--- a/curso/pptx/S52.pptx
+++ b/curso/pptx/S52.pptx
@@ -5151,7 +5151,7 @@
                 </a:solidFill>
                 <a:latin typeface="Nunito Sans"/>
               </a:rPr>
-              <a:t>Quitar las notificaciones que no sean de personas.</a:t>
+              <a:t>关掉不是来自真人的通知。</a:t>
             </a:r>
           </a:p>
           <a:p>
@@ -5176,7 +5176,7 @@
                 </a:solidFill>
                 <a:latin typeface="Nunito Sans"/>
               </a:rPr>
-              <a:t>Poner un límite de tiempo en el móvil.</a:t>
+              <a:t>在手机上设置时间限制。</a:t>
             </a:r>
           </a:p>
           <a:p>
@@ -5201,7 +5201,7 @@
                 </a:solidFill>
                 <a:latin typeface="Nunito Sans"/>
               </a:rPr>
-              <a:t>Dejar el móvil fuera de la habitación al dormir.</a:t>
+              <a:t>睡觉时把手机放在房间外面。</a:t>
             </a:r>
           </a:p>
           <a:p>
@@ -5226,7 +5226,7 @@
                 </a:solidFill>
                 <a:latin typeface="Nunito Sans"/>
               </a:rPr>
-              <a:t>Preguntarme: «¿he decidido yo seguir?»</a:t>
+              <a:t>问问自己：“继续看是我自己决定的吗？”</a:t>
             </a:r>
           </a:p>
         </p:txBody>
@@ -7020,7 +7020,7 @@
                 </a:solidFill>
                 <a:latin typeface="Nunito Sans"/>
               </a:rPr>
-              <a:t>Tu tiempo y tu atención son su negocio</a:t>
+              <a:t>你的时间和注意力就是他们的生意</a:t>
             </a:r>
           </a:p>
           <a:p>
@@ -7045,7 +7045,7 @@
                 </a:solidFill>
                 <a:latin typeface="Nunito Sans"/>
               </a:rPr>
-              <a:t>Más tiempo mirando = más anuncios vistos</a:t>
+              <a:t>看得越久 = 看到的广告越多</a:t>
             </a:r>
           </a:p>
           <a:p>
@@ -7070,7 +7070,7 @@
                 </a:solidFill>
                 <a:latin typeface="Nunito Sans"/>
               </a:rPr>
-              <a:t>No es casualidad: lo prueban y lo miden</a:t>
+              <a:t>这不是巧合：他们会测试、会测量</a:t>
             </a:r>
           </a:p>
         </p:txBody>
@@ -7707,7 +7707,7 @@
                 </a:solidFill>
                 <a:latin typeface="Nunito Sans"/>
               </a:rPr>
-              <a:t>Cada vídeo puede ser el bueno</a:t>
+              <a:t>每个视频都可能是那个好的</a:t>
             </a:r>
           </a:p>
           <a:p>
@@ -7732,7 +7732,7 @@
                 </a:solidFill>
                 <a:latin typeface="Nunito Sans"/>
               </a:rPr>
-              <a:t>Cada caja puede traer la skin rara</a:t>
+              <a:t>每个箱子都可能开出稀有皮肤</a:t>
             </a:r>
           </a:p>
           <a:p>
@@ -7757,7 +7757,7 @@
                 </a:solidFill>
                 <a:latin typeface="Nunito Sans"/>
               </a:rPr>
-              <a:t>Por eso cuesta tanto parar</a:t>
+              <a:t>所以才这么难停下来</a:t>
             </a:r>
           </a:p>
         </p:txBody>

--- a/curso/pptx/S52.pptx
+++ b/curso/pptx/S52.pptx
@@ -4047,7 +4047,7 @@
                 </a:solidFill>
                 <a:latin typeface="Fredoka"/>
               </a:rPr>
-              <a:t>案例1 · 雅斯敏的一个半小时</a:t>
+              <a:t>案例1 · 一个女孩的一个半小时</a:t>
             </a:r>
           </a:p>
         </p:txBody>
@@ -4129,7 +4129,7 @@
                 </a:solidFill>
                 <a:latin typeface="Nunito Sans"/>
               </a:rPr>
-              <a:t>雅斯敏睡前打开抖音“看一会儿”，结果待了一个半小时。她并没有决定留下来：只是没有停下来。</a:t>
+              <a:t>一个女孩睡前打开抖音“看一会儿”，结果待了一个半小时。她并没有决定留下来：只是没有停下来。</a:t>
             </a:r>
           </a:p>
         </p:txBody>
@@ -4227,7 +4227,7 @@
                 </a:solidFill>
                 <a:latin typeface="Nunito Sans"/>
               </a:rPr>
-              <a:t>雅斯敏决定了打开应用，但没有决定待这么久。</a:t>
+              <a:t>这个女孩决定了打开应用，但没有决定待这么久。</a:t>
             </a:r>
           </a:p>
           <a:p>
@@ -4356,7 +4356,7 @@
                 </a:solidFill>
                 <a:latin typeface="Fredoka"/>
               </a:rPr>
-              <a:t>案例2 · 艾托尔（Aitor）的卡包</a:t>
+              <a:t>案例2 · 一个男孩的卡包</a:t>
             </a:r>
           </a:p>
         </p:txBody>
@@ -4438,7 +4438,7 @@
                 </a:solidFill>
                 <a:latin typeface="Nunito Sans"/>
               </a:rPr>
-              <a:t>艾托尔玩一款足球电子游戏。他用真钱买球员卡包。一个月里，他花了60欧元，想抽到一个一直抽不到的球员。（虚构的。）</a:t>
+              <a:t>一个男孩玩一款足球电子游戏。他用真钱买球员卡包。一个月里，他花了60欧元，想抽到一个一直抽不到的球员。（虚构的。）</a:t>
             </a:r>
           </a:p>
         </p:txBody>
@@ -4747,7 +4747,7 @@
                 </a:solidFill>
                 <a:latin typeface="Nunito Sans"/>
               </a:rPr>
-              <a:t>艾托尔在读一本悬疑小说。每一章都在悬念中结束，他很难放下：一直读到十一点。</a:t>
+              <a:t>一个男孩在读一本悬疑小说。每一章都在悬念中结束，他很难放下：一直读到十一点。</a:t>
             </a:r>
           </a:p>
         </p:txBody>
@@ -6643,7 +6643,7 @@
                 </a:solidFill>
                 <a:latin typeface="Nunito Sans"/>
               </a:rPr>
-              <a:t>雅斯敏（Yasmin）睡前打开抖音“看一会儿”。等她看时间时，已经过去一个半小时了。她并没有决定要待这么久：只是没有停下来。</a:t>
+              <a:t>一个女孩睡前打开抖音“看一会儿”。等她看时间时，已经过去一个半小时了。她并没有决定要待这么久：只是没有停下来。</a:t>
             </a:r>
           </a:p>
         </p:txBody>
@@ -6682,7 +6682,7 @@
                 </a:solidFill>
                 <a:latin typeface="Nunito Sans"/>
               </a:rPr>
-              <a:t>这一个半小时是谁决定的：雅斯敏还是应用？</a:t>
+              <a:t>这一个半小时是谁决定的：这个女孩还是应用？</a:t>
             </a:r>
           </a:p>
         </p:txBody>
